--- a/day5/Day5_MiniZinc_Slides.pptx
+++ b/day5/Day5_MiniZinc_Slides.pptx
@@ -6542,45 +6542,6 @@
       </p:sp>
       <p:sp>
         <p:nvSpPr>
-          <p:cNvPr id="12" name="Text 10"/>
-          <p:cNvSpPr/>
-          <p:nvPr/>
-        </p:nvSpPr>
-        <p:spPr>
-          <a:xfrm>
-            <a:off x="3291840" y="2313432"/>
-            <a:ext cx="5394960" cy="420624"/>
-          </a:xfrm>
-          <a:prstGeom prst="rect">
-            <a:avLst/>
-          </a:prstGeom>
-          <a:noFill/>
-          <a:ln/>
-        </p:spPr>
-        <p:txBody>
-          <a:bodyPr wrap="square" rtlCol="0" anchor="ctr"/>
-          <a:lstStyle/>
-          <a:p>
-            <a:pPr marL="0" indent="0">
-              <a:buNone/>
-            </a:pPr>
-            <a:r>
-              <a:rPr lang="en-US" sz="1050" dirty="0">
-                <a:solidFill>
-                  <a:srgbClr val="2D3748"/>
-                </a:solidFill>
-                <a:latin typeface="Consolas" pitchFamily="34" charset="0"/>
-                <a:ea typeface="Consolas" pitchFamily="34" charset="-122"/>
-                <a:cs typeface="Consolas" pitchFamily="34" charset="-120"/>
-              </a:rPr>
-              <a:t>constraint bin_packing_capa(50, bin_of, item_size);</a:t>
-            </a:r>
-            <a:endParaRPr lang="en-US" sz="1050" dirty="0"/>
-          </a:p>
-        </p:txBody>
-      </p:sp>
-      <p:sp>
-        <p:nvSpPr>
           <p:cNvPr id="13" name="Shape 11"/>
           <p:cNvSpPr/>
           <p:nvPr/>
@@ -6713,45 +6674,6 @@
       </p:sp>
       <p:sp>
         <p:nvSpPr>
-          <p:cNvPr id="17" name="Text 15"/>
-          <p:cNvSpPr/>
-          <p:nvPr/>
-        </p:nvSpPr>
-        <p:spPr>
-          <a:xfrm>
-            <a:off x="3291840" y="2788920"/>
-            <a:ext cx="5394960" cy="420624"/>
-          </a:xfrm>
-          <a:prstGeom prst="rect">
-            <a:avLst/>
-          </a:prstGeom>
-          <a:noFill/>
-          <a:ln/>
-        </p:spPr>
-        <p:txBody>
-          <a:bodyPr wrap="square" rtlCol="0" anchor="ctr"/>
-          <a:lstStyle/>
-          <a:p>
-            <a:pPr marL="0" indent="0">
-              <a:buNone/>
-            </a:pPr>
-            <a:r>
-              <a:rPr lang="en-US" sz="1050" dirty="0">
-                <a:solidFill>
-                  <a:srgbClr val="2D3748"/>
-                </a:solidFill>
-                <a:latin typeface="Consolas" pitchFamily="34" charset="0"/>
-                <a:ea typeface="Consolas" pitchFamily="34" charset="-122"/>
-                <a:cs typeface="Consolas" pitchFamily="34" charset="-120"/>
-              </a:rPr>
-              <a:t>constraint forall(i in 1..11)(bin_of[i] &lt;= bin_of[i+1]+1);</a:t>
-            </a:r>
-            <a:endParaRPr lang="en-US" sz="1050" dirty="0"/>
-          </a:p>
-        </p:txBody>
-      </p:sp>
-      <p:sp>
-        <p:nvSpPr>
           <p:cNvPr id="18" name="Shape 16"/>
           <p:cNvSpPr/>
           <p:nvPr/>
@@ -6884,45 +6806,6 @@
       </p:sp>
       <p:sp>
         <p:nvSpPr>
-          <p:cNvPr id="22" name="Text 20"/>
-          <p:cNvSpPr/>
-          <p:nvPr/>
-        </p:nvSpPr>
-        <p:spPr>
-          <a:xfrm>
-            <a:off x="3291840" y="3264408"/>
-            <a:ext cx="5394960" cy="420624"/>
-          </a:xfrm>
-          <a:prstGeom prst="rect">
-            <a:avLst/>
-          </a:prstGeom>
-          <a:noFill/>
-          <a:ln/>
-        </p:spPr>
-        <p:txBody>
-          <a:bodyPr wrap="square" rtlCol="0" anchor="ctr"/>
-          <a:lstStyle/>
-          <a:p>
-            <a:pPr marL="0" indent="0">
-              <a:buNone/>
-            </a:pPr>
-            <a:r>
-              <a:rPr lang="en-US" sz="1050" dirty="0">
-                <a:solidFill>
-                  <a:srgbClr val="2D3748"/>
-                </a:solidFill>
-                <a:latin typeface="Consolas" pitchFamily="34" charset="0"/>
-                <a:ea typeface="Consolas" pitchFamily="34" charset="-122"/>
-                <a:cs typeface="Consolas" pitchFamily="34" charset="-120"/>
-              </a:rPr>
-              <a:t>solve minimize sum(b in BINS)(used[b]);</a:t>
-            </a:r>
-            <a:endParaRPr lang="en-US" sz="1050" dirty="0"/>
-          </a:p>
-        </p:txBody>
-      </p:sp>
-      <p:sp>
-        <p:nvSpPr>
           <p:cNvPr id="23" name="Shape 21"/>
           <p:cNvSpPr/>
           <p:nvPr/>
@@ -7086,7 +6969,18 @@
                 <a:ea typeface="Consolas" pitchFamily="34" charset="-122"/>
                 <a:cs typeface="Consolas" pitchFamily="34" charset="-120"/>
               </a:rPr>
-              <a:t>สินค้า 1,3,5 ห้ามอยู่ตู้เดียวกัน — เพิ่ม forall(i,j in {1,3,5})(bin_of[i]!=bin_of[j])</a:t>
+              <a:t>สินค้า 1,3,5 </a:t>
+            </a:r>
+            <a:r>
+              <a:rPr lang="en-US" sz="1050" dirty="0" err="1">
+                <a:solidFill>
+                  <a:srgbClr val="2D3748"/>
+                </a:solidFill>
+                <a:latin typeface="Consolas" pitchFamily="34" charset="0"/>
+                <a:ea typeface="Consolas" pitchFamily="34" charset="-122"/>
+                <a:cs typeface="Consolas" pitchFamily="34" charset="-120"/>
+              </a:rPr>
+              <a:t>ห้ามอยู่ตู้เดียวกัน</a:t>
             </a:r>
             <a:endParaRPr lang="en-US" sz="1050" dirty="0"/>
           </a:p>
@@ -16701,6 +16595,42 @@
       </p:grpSpPr>
       <p:sp>
         <p:nvSpPr>
+          <p:cNvPr id="32" name="Shape 7">
+            <a:extLst>
+              <a:ext uri="{FF2B5EF4-FFF2-40B4-BE49-F238E27FC236}">
+                <a16:creationId xmlns:a16="http://schemas.microsoft.com/office/drawing/2014/main" id="{3C6F9693-0310-72AE-91D8-487B5E7F0874}"/>
+              </a:ext>
+            </a:extLst>
+          </p:cNvPr>
+          <p:cNvSpPr/>
+          <p:nvPr/>
+        </p:nvSpPr>
+        <p:spPr>
+          <a:xfrm flipH="1" flipV="1">
+            <a:off x="2267712" y="2148840"/>
+            <a:ext cx="841248" cy="1810512"/>
+          </a:xfrm>
+          <a:prstGeom prst="line">
+            <a:avLst/>
+          </a:prstGeom>
+          <a:noFill/>
+          <a:ln w="25400">
+            <a:solidFill>
+              <a:srgbClr val="2E86AB"/>
+            </a:solidFill>
+            <a:prstDash val="dash"/>
+          </a:ln>
+        </p:spPr>
+        <p:txBody>
+          <a:bodyPr/>
+          <a:lstStyle/>
+          <a:p>
+            <a:endParaRPr lang="en-TH"/>
+          </a:p>
+        </p:txBody>
+      </p:sp>
+      <p:sp>
+        <p:nvSpPr>
           <p:cNvPr id="2" name="Shape 0"/>
           <p:cNvSpPr/>
           <p:nvPr/>
@@ -17852,42 +17782,6 @@
           <a:xfrm flipV="1">
             <a:off x="3245708" y="3840480"/>
             <a:ext cx="1692052" cy="91440"/>
-          </a:xfrm>
-          <a:prstGeom prst="line">
-            <a:avLst/>
-          </a:prstGeom>
-          <a:noFill/>
-          <a:ln w="25400">
-            <a:solidFill>
-              <a:srgbClr val="2E86AB"/>
-            </a:solidFill>
-            <a:prstDash val="dash"/>
-          </a:ln>
-        </p:spPr>
-        <p:txBody>
-          <a:bodyPr/>
-          <a:lstStyle/>
-          <a:p>
-            <a:endParaRPr lang="en-TH"/>
-          </a:p>
-        </p:txBody>
-      </p:sp>
-      <p:sp>
-        <p:nvSpPr>
-          <p:cNvPr id="32" name="Shape 7">
-            <a:extLst>
-              <a:ext uri="{FF2B5EF4-FFF2-40B4-BE49-F238E27FC236}">
-                <a16:creationId xmlns:a16="http://schemas.microsoft.com/office/drawing/2014/main" id="{3C6F9693-0310-72AE-91D8-487B5E7F0874}"/>
-              </a:ext>
-            </a:extLst>
-          </p:cNvPr>
-          <p:cNvSpPr/>
-          <p:nvPr/>
-        </p:nvSpPr>
-        <p:spPr>
-          <a:xfrm flipH="1" flipV="1">
-            <a:off x="2267712" y="2148840"/>
-            <a:ext cx="841248" cy="1810512"/>
           </a:xfrm>
           <a:prstGeom prst="line">
             <a:avLst/>
@@ -20999,45 +20893,6 @@
       </p:sp>
       <p:sp>
         <p:nvSpPr>
-          <p:cNvPr id="12" name="Text 10"/>
-          <p:cNvSpPr/>
-          <p:nvPr/>
-        </p:nvSpPr>
-        <p:spPr>
-          <a:xfrm>
-            <a:off x="3383280" y="2313432"/>
-            <a:ext cx="5303520" cy="420624"/>
-          </a:xfrm>
-          <a:prstGeom prst="rect">
-            <a:avLst/>
-          </a:prstGeom>
-          <a:noFill/>
-          <a:ln/>
-        </p:spPr>
-        <p:txBody>
-          <a:bodyPr wrap="square" rtlCol="0" anchor="ctr"/>
-          <a:lstStyle/>
-          <a:p>
-            <a:pPr marL="0" indent="0">
-              <a:buNone/>
-            </a:pPr>
-            <a:r>
-              <a:rPr lang="en-US" sz="1050" dirty="0">
-                <a:solidFill>
-                  <a:srgbClr val="2D3748"/>
-                </a:solidFill>
-                <a:latin typeface="Consolas" pitchFamily="34" charset="0"/>
-                <a:ea typeface="Consolas" pitchFamily="34" charset="-122"/>
-                <a:cs typeface="Consolas" pitchFamily="34" charset="-120"/>
-              </a:rPr>
-              <a:t>constraint circuit(next);  % บังคับ Hamiltonian circuit</a:t>
-            </a:r>
-            <a:endParaRPr lang="en-US" sz="1050" dirty="0"/>
-          </a:p>
-        </p:txBody>
-      </p:sp>
-      <p:sp>
-        <p:nvSpPr>
           <p:cNvPr id="13" name="Shape 11"/>
           <p:cNvSpPr/>
           <p:nvPr/>
@@ -21170,45 +21025,6 @@
       </p:sp>
       <p:sp>
         <p:nvSpPr>
-          <p:cNvPr id="17" name="Text 15"/>
-          <p:cNvSpPr/>
-          <p:nvPr/>
-        </p:nvSpPr>
-        <p:spPr>
-          <a:xfrm>
-            <a:off x="3383280" y="2788920"/>
-            <a:ext cx="5303520" cy="420624"/>
-          </a:xfrm>
-          <a:prstGeom prst="rect">
-            <a:avLst/>
-          </a:prstGeom>
-          <a:noFill/>
-          <a:ln/>
-        </p:spPr>
-        <p:txBody>
-          <a:bodyPr wrap="square" rtlCol="0" anchor="ctr"/>
-          <a:lstStyle/>
-          <a:p>
-            <a:pPr marL="0" indent="0">
-              <a:buNone/>
-            </a:pPr>
-            <a:r>
-              <a:rPr lang="en-US" sz="1050" dirty="0">
-                <a:solidFill>
-                  <a:srgbClr val="2D3748"/>
-                </a:solidFill>
-                <a:latin typeface="Consolas" pitchFamily="34" charset="0"/>
-                <a:ea typeface="Consolas" pitchFamily="34" charset="-122"/>
-                <a:cs typeface="Consolas" pitchFamily="34" charset="-120"/>
-              </a:rPr>
-              <a:t>load[i] = demand[i] + (if next[i] in DEPOT then 0 else load[next[i]] endif)</a:t>
-            </a:r>
-            <a:endParaRPr lang="en-US" sz="1050" dirty="0"/>
-          </a:p>
-        </p:txBody>
-      </p:sp>
-      <p:sp>
-        <p:nvSpPr>
           <p:cNvPr id="18" name="Shape 16"/>
           <p:cNvSpPr/>
           <p:nvPr/>
@@ -21341,45 +21157,6 @@
       </p:sp>
       <p:sp>
         <p:nvSpPr>
-          <p:cNvPr id="22" name="Text 20"/>
-          <p:cNvSpPr/>
-          <p:nvPr/>
-        </p:nvSpPr>
-        <p:spPr>
-          <a:xfrm>
-            <a:off x="3383280" y="3264408"/>
-            <a:ext cx="5303520" cy="420624"/>
-          </a:xfrm>
-          <a:prstGeom prst="rect">
-            <a:avLst/>
-          </a:prstGeom>
-          <a:noFill/>
-          <a:ln/>
-        </p:spPr>
-        <p:txBody>
-          <a:bodyPr wrap="square" rtlCol="0" anchor="ctr"/>
-          <a:lstStyle/>
-          <a:p>
-            <a:pPr marL="0" indent="0">
-              <a:buNone/>
-            </a:pPr>
-            <a:r>
-              <a:rPr lang="en-US" sz="1050" dirty="0">
-                <a:solidFill>
-                  <a:srgbClr val="2D3748"/>
-                </a:solidFill>
-                <a:latin typeface="Consolas" pitchFamily="34" charset="0"/>
-                <a:ea typeface="Consolas" pitchFamily="34" charset="-122"/>
-                <a:cs typeface="Consolas" pitchFamily="34" charset="-120"/>
-              </a:rPr>
-              <a:t>constraint forall(i in CUST)(load[i] &lt;= capacity);</a:t>
-            </a:r>
-            <a:endParaRPr lang="en-US" sz="1050" dirty="0"/>
-          </a:p>
-        </p:txBody>
-      </p:sp>
-      <p:sp>
-        <p:nvSpPr>
           <p:cNvPr id="23" name="Shape 21"/>
           <p:cNvSpPr/>
           <p:nvPr/>
@@ -21507,45 +21284,6 @@
               <a:t>solve minimize ระยะทาง: </a:t>
             </a:r>
             <a:endParaRPr lang="en-US" sz="1150" dirty="0"/>
-          </a:p>
-        </p:txBody>
-      </p:sp>
-      <p:sp>
-        <p:nvSpPr>
-          <p:cNvPr id="27" name="Text 25"/>
-          <p:cNvSpPr/>
-          <p:nvPr/>
-        </p:nvSpPr>
-        <p:spPr>
-          <a:xfrm>
-            <a:off x="3383280" y="3739896"/>
-            <a:ext cx="5303520" cy="420624"/>
-          </a:xfrm>
-          <a:prstGeom prst="rect">
-            <a:avLst/>
-          </a:prstGeom>
-          <a:noFill/>
-          <a:ln/>
-        </p:spPr>
-        <p:txBody>
-          <a:bodyPr wrap="square" rtlCol="0" anchor="ctr"/>
-          <a:lstStyle/>
-          <a:p>
-            <a:pPr marL="0" indent="0">
-              <a:buNone/>
-            </a:pPr>
-            <a:r>
-              <a:rPr lang="en-US" sz="1050" dirty="0">
-                <a:solidFill>
-                  <a:srgbClr val="2D3748"/>
-                </a:solidFill>
-                <a:latin typeface="Consolas" pitchFamily="34" charset="0"/>
-                <a:ea typeface="Consolas" pitchFamily="34" charset="-122"/>
-                <a:cs typeface="Consolas" pitchFamily="34" charset="-120"/>
-              </a:rPr>
-              <a:t>solve minimize sum(i in ALL)(dist[i,next[i]]);</a:t>
-            </a:r>
-            <a:endParaRPr lang="en-US" sz="1050" dirty="0"/>
           </a:p>
         </p:txBody>
       </p:sp>
